--- a/docs/ativo/material_reuniao_orientador_2026-06.pptx
+++ b/docs/ativo/material_reuniao_orientador_2026-06.pptx
@@ -3508,7 +3508,7 @@
               </a:defRPr>
             </a:pPr>
             <a:r>
-              <a:t>Resposta direta ao caso Hassanpour; FaceScanPaliGemma confirmado como SOTA atual</a:t>
+              <a:t>Triangulação em fonte primária; FaceScanPaliGemma confirmado como SOTA atual</a:t>
             </a:r>
           </a:p>
           <a:p>
@@ -9393,7 +9393,7 @@
               </a:defRPr>
             </a:pPr>
             <a:r>
-              <a:t>5 critérios + 4 fases + verificação anti-Hassanpour</a:t>
+              <a:t>5 critérios + 4 fases + rigor de citação</a:t>
             </a:r>
           </a:p>
         </p:txBody>
@@ -12918,7 +12918,7 @@
               </a:defRPr>
             </a:pPr>
             <a:r>
-              <a:t>(ii) Cinco de sete citações principais com autoria fabricada (caso Hassanpour)</a:t>
+              <a:t>(ii) Autoria incorreta em parte das citações principais</a:t>
             </a:r>
           </a:p>
           <a:p>
@@ -15051,7 +15051,7 @@
               </a:defRPr>
             </a:pPr>
             <a:r>
-              <a:t>1.5  Metodologia Q&amp;A e protocolo anti-Hassanpour</a:t>
+              <a:t>1.5  Metodologia Q&amp;A e protocolo de rigor bibliográfico</a:t>
             </a:r>
           </a:p>
         </p:txBody>
